--- a/docs/교재/통합반/11일차/통합반_11일차.pptx
+++ b/docs/교재/통합반/11일차/통합반_11일차.pptx
@@ -3294,7 +3294,7 @@
           <a:lstStyle/>
           <a:p>
             <a:r>
-              <a:t>왼쪽은 이 과정에서 배운 것이 제품에 그대로 보이는 자리입니다. 프로세스 정의와 인스턴스, 워크아이템의 상태, 에이전트 행, 사람 작업으로 그린 승인은 이름과 뜻까지 같습니다. 오른쪽은 제품에서 더 고도화된 것으로, 말로 설명해 정의를 만드는 길, 하위 프로세스와 다중 인스턴스, 여러 에이전트의 협업과 실행 방식, 문서 색인이 여기에 듭니다. 통제에서는 실패했을 때 끝난 작업을 되돌리는 보상과 프로세스 모델에 대는 감사가, 운영에서는 외부 알림 연동과 확장이 더해집니다. 여기까지 배운 구조가 실제 제품에서는 이만큼 넓고 깊어집니다.</a:t>
+              <a:t>왼쪽은 이 과정에서 배운 것이 제품에 그대로 보이는 자리입니다. 프로세스 정의와 인스턴스, 워크아이템의 상태, 에이전트 행, 사람 작업으로 그린 승인은 이름과 뜻까지 같습니다. 오른쪽은 제품에서 더 고도화된 것으로, 말로 설명해 정의를 만드는 길, 하위 프로세스와 다중 인스턴스, 여러 에이전트의 협업과 실행 방식, 문서 색인이 여기에 듭니다. 통제에서는 실패했을 때 끝난 작업을 되돌리는 보상과 프로세스 모델에 대는 감사가, 운영에서는 외부 알림 연동과 확장이 더해집니다.</a:t>
             </a:r>
           </a:p>
         </p:txBody>
@@ -8326,7 +8326,7 @@
       </p:sp>
       <p:pic>
         <p:nvPicPr>
-          <p:cNvPr id="6" name="삽화:원인후보.svg" descr="illust_2464290751494805853_1791712364.png"/>
+          <p:cNvPr id="6" name="삽화:원인후보.svg" descr="illust_2580380579412065399_1791712364.png"/>
           <p:cNvPicPr>
             <a:picLocks noChangeAspect="1"/>
           </p:cNvPicPr>
@@ -18954,7 +18954,7 @@
       </p:sp>
       <p:pic>
         <p:nvPicPr>
-          <p:cNvPr id="6" name="삽화:사건선_지식에서판단.svg" descr="illust_4115181958234095574_1791770778.png"/>
+          <p:cNvPr id="6" name="삽화:사건선_지식에서판단.svg" descr="illust_6568418362330020873_1791770778.png"/>
           <p:cNvPicPr>
             <a:picLocks noChangeAspect="1"/>
           </p:cNvPicPr>
@@ -21830,7 +21830,7 @@
       </p:sp>
       <p:pic>
         <p:nvPicPr>
-          <p:cNvPr id="6" name="삽화:장치자리.svg" descr="illust_6371234324685882801_1791770880.png"/>
+          <p:cNvPr id="6" name="삽화:장치자리.svg" descr="illust_8073703214766088925_1791770880.png"/>
           <p:cNvPicPr>
             <a:picLocks noChangeAspect="1"/>
           </p:cNvPicPr>
@@ -27704,7 +27704,7 @@
       </p:sp>
       <p:pic>
         <p:nvPicPr>
-          <p:cNvPr id="6" name="삽화:사람자리.svg" descr="illust_100455412622406882_1791770778.png"/>
+          <p:cNvPr id="6" name="삽화:사람자리.svg" descr="illust_6191690086155159347_1791770778.png"/>
           <p:cNvPicPr>
             <a:picLocks noChangeAspect="1"/>
           </p:cNvPicPr>
@@ -29231,7 +29231,7 @@
       </p:sp>
       <p:pic>
         <p:nvPicPr>
-          <p:cNvPr id="6" name="삽화:시스템실행.svg" descr="illust_6601188254725680166_1791770778.png"/>
+          <p:cNvPr id="6" name="삽화:시스템실행.svg" descr="illust_8404163319084259960_1791770778.png"/>
           <p:cNvPicPr>
             <a:picLocks noChangeAspect="1"/>
           </p:cNvPicPr>
@@ -30620,7 +30620,7 @@
       </p:sp>
       <p:pic>
         <p:nvPicPr>
-          <p:cNvPr id="6" name="삽화:세처리건.svg" descr="illust_8008850809700808217_1791770778.png"/>
+          <p:cNvPr id="6" name="삽화:세처리건.svg" descr="illust_6041202388623304472_1791770778.png"/>
           <p:cNvPicPr>
             <a:picLocks noChangeAspect="1"/>
           </p:cNvPicPr>
@@ -35285,7 +35285,7 @@
       </p:sp>
       <p:pic>
         <p:nvPicPr>
-          <p:cNvPr id="6" name="삽화:세영역.svg" descr="illust_869569013340362544_1791770778.png"/>
+          <p:cNvPr id="6" name="삽화:세영역.svg" descr="illust_6992281540925035187_1791770778.png"/>
           <p:cNvPicPr>
             <a:picLocks noChangeAspect="1"/>
           </p:cNvPicPr>
@@ -42016,7 +42016,7 @@
       </p:sp>
       <p:pic>
         <p:nvPicPr>
-          <p:cNvPr id="6" name="삽화:사건선_전체.svg" descr="illust_580393661342327190_1791770778.png"/>
+          <p:cNvPr id="6" name="삽화:사건선_전체.svg" descr="illust_3614505458644883257_1791770778.png"/>
           <p:cNvPicPr>
             <a:picLocks noChangeAspect="1"/>
           </p:cNvPicPr>
@@ -43564,7 +43564,7 @@
                 <a:ea typeface="맑은 고딕"/>
                 <a:cs typeface="맑은 고딕"/>
               </a:rPr>
-              <a:t>지식 그래프, 에이전트, 처리 건은 제품에서도 같은 구실을 하며, 프로세스 쪽은 부르는 이름이 달라진다.</a:t>
+              <a:t>처리 건은 프로세스 인스턴스, 단계는 워크아이템으로 이름만 바뀌어, 포털에서 읽던 방법이 제품에서도 통한다.</a:t>
             </a:r>
           </a:p>
         </p:txBody>
@@ -44847,7 +44847,7 @@
       </p:sp>
       <p:pic>
         <p:nvPicPr>
-          <p:cNvPr id="6" name="삽화:작업목록.svg" descr="illust_4547320553672331463_1791770778.png"/>
+          <p:cNvPr id="6" name="삽화:작업목록.svg" descr="illust_8752531873981329081_1791770778.png"/>
           <p:cNvPicPr>
             <a:picLocks noChangeAspect="1"/>
           </p:cNvPicPr>
@@ -46457,7 +46457,7 @@
                 <a:ea typeface="맑은 고딕"/>
                 <a:cs typeface="맑은 고딕"/>
               </a:rPr>
-              <a:t>시연에서는 정의에서 열린 인스턴스가 에이전트 작업과 사람 작업으로 이어지는 흐름을 포털에서 읽던 방법으로 따라간다.</a:t>
+              <a:t>시연에서 볼 것은 정의에서 열린 인스턴스가 에이전트 작업과 사람 작업으로 이어지는 흐름과 통제가 놓인 자리이다.</a:t>
             </a:r>
           </a:p>
         </p:txBody>
@@ -50038,7 +50038,7 @@
       </p:sp>
       <p:pic>
         <p:nvPicPr>
-          <p:cNvPr id="6" name="삽화:사건선_영역.svg" descr="illust_4470651754948250416_1791770778.png"/>
+          <p:cNvPr id="6" name="삽화:사건선_영역.svg" descr="illust_7169711022442737646_1791770778.png"/>
           <p:cNvPicPr>
             <a:picLocks noChangeAspect="1"/>
           </p:cNvPicPr>
@@ -54423,7 +54423,7 @@
       </p:sp>
       <p:pic>
         <p:nvPicPr>
-          <p:cNvPr id="6" name="삽화:호출과지식.svg" descr="illust_3495053311516443325_1791770778.png"/>
+          <p:cNvPr id="6" name="삽화:호출과지식.svg" descr="illust_3183643196174708811_1791770778.png"/>
           <p:cNvPicPr>
             <a:picLocks noChangeAspect="1"/>
           </p:cNvPicPr>
